--- a/m4/diapositivos/aula-18-f11.pptx
+++ b/m4/diapositivos/aula-18-f11.pptx
@@ -5967,7 +5967,7 @@
         <p:spPr>
           <a:xfrm>
             <a:off x="1005840" y="2697480"/>
-            <a:ext cx="0" cy="1581912"/>
+            <a:ext cx="0" cy="1200912"/>
           </a:xfrm>
           <a:prstGeom prst="line">
             <a:avLst/>
@@ -6054,7 +6054,7 @@
         <p:spPr>
           <a:xfrm>
             <a:off x="1417320" y="2523744"/>
-            <a:ext cx="9174175" cy="981456"/>
+            <a:ext cx="9174175" cy="600456"/>
           </a:xfrm>
           <a:prstGeom prst="rect">
             <a:avLst/>
@@ -6083,7 +6083,7 @@
                 <a:ea typeface="Arial" pitchFamily="34" charset="-122"/>
                 <a:cs typeface="Arial" pitchFamily="34" charset="-120"/>
               </a:rPr>
-              <a:t>A peroração: fecha o discurso e despede-se de quem ouve</a:t>
+              <a:t>A peroração: fecha o discurso e despede-se</a:t>
             </a:r>
             <a:endParaRPr lang="en-US" sz="2400" dirty="0"/>
           </a:p>
@@ -6097,7 +6097,7 @@
         </p:nvSpPr>
         <p:spPr>
           <a:xfrm>
-            <a:off x="822960" y="3496056"/>
+            <a:off x="822960" y="3115056"/>
             <a:ext cx="365760" cy="365760"/>
           </a:xfrm>
           <a:prstGeom prst="ellipse">
@@ -6122,7 +6122,7 @@
         </p:nvSpPr>
         <p:spPr>
           <a:xfrm>
-            <a:off x="822960" y="3496056"/>
+            <a:off x="822960" y="3115056"/>
             <a:ext cx="365760" cy="365760"/>
           </a:xfrm>
           <a:prstGeom prst="rect">
@@ -6161,7 +6161,7 @@
         </p:nvSpPr>
         <p:spPr>
           <a:xfrm>
-            <a:off x="1417320" y="3505200"/>
+            <a:off x="1417320" y="3124200"/>
             <a:ext cx="9174175" cy="600456"/>
           </a:xfrm>
           <a:prstGeom prst="rect">
@@ -6205,7 +6205,7 @@
         </p:nvSpPr>
         <p:spPr>
           <a:xfrm>
-            <a:off x="822960" y="4096512"/>
+            <a:off x="822960" y="3715512"/>
             <a:ext cx="365760" cy="365760"/>
           </a:xfrm>
           <a:prstGeom prst="ellipse">
@@ -6230,7 +6230,7 @@
         </p:nvSpPr>
         <p:spPr>
           <a:xfrm>
-            <a:off x="822960" y="4096512"/>
+            <a:off x="822960" y="3715512"/>
             <a:ext cx="365760" cy="365760"/>
           </a:xfrm>
           <a:prstGeom prst="rect">
@@ -6269,7 +6269,7 @@
         </p:nvSpPr>
         <p:spPr>
           <a:xfrm>
-            <a:off x="1417320" y="4105656"/>
+            <a:off x="1417320" y="3724656"/>
             <a:ext cx="9174175" cy="600456"/>
           </a:xfrm>
           <a:prstGeom prst="rect">
@@ -6299,7 +6299,7 @@
                 <a:ea typeface="Arial" pitchFamily="34" charset="-122"/>
                 <a:cs typeface="Arial" pitchFamily="34" charset="-120"/>
               </a:rPr>
-              <a:t>O tema: diz de que fala o discurso</a:t>
+              <a:t>O tema: anuncia de que vai falar o discurso</a:t>
             </a:r>
             <a:endParaRPr lang="en-US" sz="2400" dirty="0"/>
           </a:p>
@@ -6550,7 +6550,7 @@
                 <a:ea typeface="Arial" pitchFamily="34" charset="-122"/>
                 <a:cs typeface="Arial" pitchFamily="34" charset="-120"/>
               </a:rPr>
-              <a:t>A peroração: fecha o discurso e despede-se de quem ouve</a:t>
+              <a:t>A peroração: fecha o discurso e despede-se</a:t>
             </a:r>
             <a:endParaRPr lang="en-US" sz="3400" dirty="0"/>
           </a:p>
@@ -15192,7 +15192,7 @@
                 <a:ea typeface="Arial" pitchFamily="34" charset="-122"/>
                 <a:cs typeface="Arial" pitchFamily="34" charset="-120"/>
               </a:rPr>
-              <a:t>Que a doutrina era má e não servia</a:t>
+              <a:t>Que a doutrina era má e não servia a ninguém</a:t>
             </a:r>
             <a:endParaRPr lang="en-US" sz="2400" dirty="0"/>
           </a:p>
@@ -15300,7 +15300,7 @@
                 <a:ea typeface="Arial" pitchFamily="34" charset="-122"/>
                 <a:cs typeface="Arial" pitchFamily="34" charset="-120"/>
               </a:rPr>
-              <a:t>Que a doutrina é para eles: o mar é só a alegoria</a:t>
+              <a:t>Que a doutrina é para eles; o mar é alegoria</a:t>
             </a:r>
             <a:endParaRPr lang="en-US" sz="2400" dirty="0"/>
           </a:p>
@@ -15659,7 +15659,7 @@
                 <a:ea typeface="Arial" pitchFamily="34" charset="-122"/>
                 <a:cs typeface="Arial" pitchFamily="34" charset="-120"/>
               </a:rPr>
-              <a:t>Que a doutrina é para eles: o mar é só a alegoria</a:t>
+              <a:t>Que a doutrina é para eles; o mar é alegoria</a:t>
             </a:r>
             <a:endParaRPr lang="en-US" sz="3400" dirty="0"/>
           </a:p>
